--- a/reports/11/presentation.pptx
+++ b/reports/11/presentation.pptx
@@ -933,7 +933,7 @@
           <a:lstStyle/>
           <a:p>
             <a:r>
-              <a:t>Nous avons travaillé en binôme avec une méthodologie Agile. Le dataset Kaggle CC0 contient 24 042 observations et 15 colonnes. Les deux capteurs les plus discriminants sont la vibration et la température moteur. Le déséquilibre des classes (~25% pannes) justifie notre choix de métriques F1 et PR-AUC.</a:t>
+              <a:t>Nous avons travaillé en binôme avec une méthodologie Agile. Le dataset Kaggle CC0 contient 24 042 observations et 15 colonnes. Les deux capteurs les plus discriminants sont la vibration et la température moteur. Le déséquilibre des classes (~14.8% pannes) justifie notre choix de métriques F1 et PR-AUC.</a:t>
             </a:r>
           </a:p>
         </p:txBody>
@@ -8950,7 +8950,7 @@
                 </a:solidFill>
                 <a:latin typeface="Calibri"/>
               </a:rPr>
-              <a:t>· Déséquilibre : ~25% pannes (justifie F1 + PR-AUC)</a:t>
+              <a:t>· Déséquilibre : ~14.8% pannes (justifie F1 + PR-AUC)</a:t>
             </a:r>
           </a:p>
           <a:p>

--- a/reports/11/presentation.pptx
+++ b/reports/11/presentation.pptx
@@ -9031,8 +9031,8 @@
           <p:nvPr/>
         </p:nvGraphicFramePr>
         <p:xfrm>
-          <a:off x="612648" y="3749039"/>
-          <a:ext cx="10972800" cy="2194560"/>
+          <a:off x="612648" y="3794760"/>
+          <a:ext cx="10972800" cy="2423160"/>
         </p:xfrm>
         <a:graphic>
           <a:graphicData uri="http://schemas.openxmlformats.org/drawingml/2006/table">
@@ -9046,7 +9046,7 @@
                 <a:gridCol w="2743200"/>
                 <a:gridCol w="2743200"/>
               </a:tblGrid>
-              <a:tr h="365760">
+              <a:tr h="346165">
                 <a:tc>
                   <a:txBody>
                     <a:bodyPr/>
@@ -9140,7 +9140,7 @@
                   </a:tcPr>
                 </a:tc>
               </a:tr>
-              <a:tr h="365760">
+              <a:tr h="346165">
                 <a:tc>
                   <a:txBody>
                     <a:bodyPr/>
@@ -9234,7 +9234,7 @@
                   </a:tcPr>
                 </a:tc>
               </a:tr>
-              <a:tr h="365760">
+              <a:tr h="346165">
                 <a:tc>
                   <a:txBody>
                     <a:bodyPr/>
@@ -9328,7 +9328,7 @@
                   </a:tcPr>
                 </a:tc>
               </a:tr>
-              <a:tr h="365760">
+              <a:tr h="346165">
                 <a:tc>
                   <a:txBody>
                     <a:bodyPr/>
@@ -9342,195 +9342,7 @@
                           </a:solidFill>
                           <a:latin typeface="Calibri"/>
                         </a:rPr>
-                        <a:t>failure_within_24h</a:t>
-                      </a:r>
-                    </a:p>
-                  </a:txBody>
-                  <a:tcPr>
-                    <a:solidFill>
-                      <a:srgbClr val="FFFFFF"/>
-                    </a:solidFill>
-                  </a:tcPr>
-                </a:tc>
-                <a:tc>
-                  <a:txBody>
-                    <a:bodyPr/>
-                    <a:lstStyle/>
-                    <a:p>
-                      <a:pPr algn="ctr"/>
-                      <a:r>
-                        <a:rPr sz="1100" b="0">
-                          <a:solidFill>
-                            <a:srgbClr val="212121"/>
-                          </a:solidFill>
-                          <a:latin typeface="Calibri"/>
-                        </a:rPr>
-                        <a:t>int 0/1</a:t>
-                      </a:r>
-                    </a:p>
-                  </a:txBody>
-                  <a:tcPr>
-                    <a:solidFill>
-                      <a:srgbClr val="FFFFFF"/>
-                    </a:solidFill>
-                  </a:tcPr>
-                </a:tc>
-                <a:tc>
-                  <a:txBody>
-                    <a:bodyPr/>
-                    <a:lstStyle/>
-                    <a:p>
-                      <a:pPr algn="ctr"/>
-                      <a:r>
-                        <a:rPr sz="1100" b="0">
-                          <a:solidFill>
-                            <a:srgbClr val="212121"/>
-                          </a:solidFill>
-                          <a:latin typeface="Calibri"/>
-                        </a:rPr>
-                        <a:t>-</a:t>
-                      </a:r>
-                    </a:p>
-                  </a:txBody>
-                  <a:tcPr>
-                    <a:solidFill>
-                      <a:srgbClr val="FFFFFF"/>
-                    </a:solidFill>
-                  </a:tcPr>
-                </a:tc>
-                <a:tc>
-                  <a:txBody>
-                    <a:bodyPr/>
-                    <a:lstStyle/>
-                    <a:p>
-                      <a:pPr algn="ctr"/>
-                      <a:r>
-                        <a:rPr sz="1100" b="0">
-                          <a:solidFill>
-                            <a:srgbClr val="212121"/>
-                          </a:solidFill>
-                          <a:latin typeface="Calibri"/>
-                        </a:rPr>
-                        <a:t>Cible binaire principale</a:t>
-                      </a:r>
-                    </a:p>
-                  </a:txBody>
-                  <a:tcPr>
-                    <a:solidFill>
-                      <a:srgbClr val="FFFFFF"/>
-                    </a:solidFill>
-                  </a:tcPr>
-                </a:tc>
-              </a:tr>
-              <a:tr h="365760">
-                <a:tc>
-                  <a:txBody>
-                    <a:bodyPr/>
-                    <a:lstStyle/>
-                    <a:p>
-                      <a:pPr algn="ctr"/>
-                      <a:r>
-                        <a:rPr sz="1100" b="0">
-                          <a:solidFill>
-                            <a:srgbClr val="212121"/>
-                          </a:solidFill>
-                          <a:latin typeface="Calibri"/>
-                        </a:rPr>
-                        <a:t>failure_type</a:t>
-                      </a:r>
-                    </a:p>
-                  </a:txBody>
-                  <a:tcPr>
-                    <a:solidFill>
-                      <a:srgbClr val="F5F7FA"/>
-                    </a:solidFill>
-                  </a:tcPr>
-                </a:tc>
-                <a:tc>
-                  <a:txBody>
-                    <a:bodyPr/>
-                    <a:lstStyle/>
-                    <a:p>
-                      <a:pPr algn="ctr"/>
-                      <a:r>
-                        <a:rPr sz="1100" b="0">
-                          <a:solidFill>
-                            <a:srgbClr val="212121"/>
-                          </a:solidFill>
-                          <a:latin typeface="Calibri"/>
-                        </a:rPr>
-                        <a:t>catégorie</a:t>
-                      </a:r>
-                    </a:p>
-                  </a:txBody>
-                  <a:tcPr>
-                    <a:solidFill>
-                      <a:srgbClr val="F5F7FA"/>
-                    </a:solidFill>
-                  </a:tcPr>
-                </a:tc>
-                <a:tc>
-                  <a:txBody>
-                    <a:bodyPr/>
-                    <a:lstStyle/>
-                    <a:p>
-                      <a:pPr algn="ctr"/>
-                      <a:r>
-                        <a:rPr sz="1100" b="0">
-                          <a:solidFill>
-                            <a:srgbClr val="212121"/>
-                          </a:solidFill>
-                          <a:latin typeface="Calibri"/>
-                        </a:rPr>
-                        <a:t>5 classes</a:t>
-                      </a:r>
-                    </a:p>
-                  </a:txBody>
-                  <a:tcPr>
-                    <a:solidFill>
-                      <a:srgbClr val="F5F7FA"/>
-                    </a:solidFill>
-                  </a:tcPr>
-                </a:tc>
-                <a:tc>
-                  <a:txBody>
-                    <a:bodyPr/>
-                    <a:lstStyle/>
-                    <a:p>
-                      <a:pPr algn="ctr"/>
-                      <a:r>
-                        <a:rPr sz="1100" b="0">
-                          <a:solidFill>
-                            <a:srgbClr val="212121"/>
-                          </a:solidFill>
-                          <a:latin typeface="Calibri"/>
-                        </a:rPr>
-                        <a:t>Cible multiclasse</a:t>
-                      </a:r>
-                    </a:p>
-                  </a:txBody>
-                  <a:tcPr>
-                    <a:solidFill>
-                      <a:srgbClr val="F5F7FA"/>
-                    </a:solidFill>
-                  </a:tcPr>
-                </a:tc>
-              </a:tr>
-              <a:tr h="365760">
-                <a:tc>
-                  <a:txBody>
-                    <a:bodyPr/>
-                    <a:lstStyle/>
-                    <a:p>
-                      <a:pPr algn="ctr"/>
-                      <a:r>
-                        <a:rPr sz="1100" b="0">
-                          <a:solidFill>
-                            <a:srgbClr val="212121"/>
-                          </a:solidFill>
-                          <a:latin typeface="Calibri"/>
-                        </a:rPr>
-                        <a:t>rul_hours</a:t>
+                        <a:t>hours_since_maintenance</a:t>
                       </a:r>
                     </a:p>
                   </a:txBody>
@@ -9599,13 +9411,295 @@
                           </a:solidFill>
                           <a:latin typeface="Calibri"/>
                         </a:rPr>
+                        <a:t>Feature (proxy d'usure)</a:t>
+                      </a:r>
+                    </a:p>
+                  </a:txBody>
+                  <a:tcPr>
+                    <a:solidFill>
+                      <a:srgbClr val="FFFFFF"/>
+                    </a:solidFill>
+                  </a:tcPr>
+                </a:tc>
+              </a:tr>
+              <a:tr h="346165">
+                <a:tc>
+                  <a:txBody>
+                    <a:bodyPr/>
+                    <a:lstStyle/>
+                    <a:p>
+                      <a:pPr algn="ctr"/>
+                      <a:r>
+                        <a:rPr sz="1100" b="0">
+                          <a:solidFill>
+                            <a:srgbClr val="212121"/>
+                          </a:solidFill>
+                          <a:latin typeface="Calibri"/>
+                        </a:rPr>
+                        <a:t>failure_within_24h</a:t>
+                      </a:r>
+                    </a:p>
+                  </a:txBody>
+                  <a:tcPr>
+                    <a:solidFill>
+                      <a:srgbClr val="F5F7FA"/>
+                    </a:solidFill>
+                  </a:tcPr>
+                </a:tc>
+                <a:tc>
+                  <a:txBody>
+                    <a:bodyPr/>
+                    <a:lstStyle/>
+                    <a:p>
+                      <a:pPr algn="ctr"/>
+                      <a:r>
+                        <a:rPr sz="1100" b="0">
+                          <a:solidFill>
+                            <a:srgbClr val="212121"/>
+                          </a:solidFill>
+                          <a:latin typeface="Calibri"/>
+                        </a:rPr>
+                        <a:t>int 0/1</a:t>
+                      </a:r>
+                    </a:p>
+                  </a:txBody>
+                  <a:tcPr>
+                    <a:solidFill>
+                      <a:srgbClr val="F5F7FA"/>
+                    </a:solidFill>
+                  </a:tcPr>
+                </a:tc>
+                <a:tc>
+                  <a:txBody>
+                    <a:bodyPr/>
+                    <a:lstStyle/>
+                    <a:p>
+                      <a:pPr algn="ctr"/>
+                      <a:r>
+                        <a:rPr sz="1100" b="0">
+                          <a:solidFill>
+                            <a:srgbClr val="212121"/>
+                          </a:solidFill>
+                          <a:latin typeface="Calibri"/>
+                        </a:rPr>
+                        <a:t>-</a:t>
+                      </a:r>
+                    </a:p>
+                  </a:txBody>
+                  <a:tcPr>
+                    <a:solidFill>
+                      <a:srgbClr val="F5F7FA"/>
+                    </a:solidFill>
+                  </a:tcPr>
+                </a:tc>
+                <a:tc>
+                  <a:txBody>
+                    <a:bodyPr/>
+                    <a:lstStyle/>
+                    <a:p>
+                      <a:pPr algn="ctr"/>
+                      <a:r>
+                        <a:rPr sz="1100" b="0">
+                          <a:solidFill>
+                            <a:srgbClr val="212121"/>
+                          </a:solidFill>
+                          <a:latin typeface="Calibri"/>
+                        </a:rPr>
+                        <a:t>Cible binaire principale</a:t>
+                      </a:r>
+                    </a:p>
+                  </a:txBody>
+                  <a:tcPr>
+                    <a:solidFill>
+                      <a:srgbClr val="F5F7FA"/>
+                    </a:solidFill>
+                  </a:tcPr>
+                </a:tc>
+              </a:tr>
+              <a:tr h="346165">
+                <a:tc>
+                  <a:txBody>
+                    <a:bodyPr/>
+                    <a:lstStyle/>
+                    <a:p>
+                      <a:pPr algn="ctr"/>
+                      <a:r>
+                        <a:rPr sz="1100" b="0">
+                          <a:solidFill>
+                            <a:srgbClr val="212121"/>
+                          </a:solidFill>
+                          <a:latin typeface="Calibri"/>
+                        </a:rPr>
+                        <a:t>failure_type</a:t>
+                      </a:r>
+                    </a:p>
+                  </a:txBody>
+                  <a:tcPr>
+                    <a:solidFill>
+                      <a:srgbClr val="FFFFFF"/>
+                    </a:solidFill>
+                  </a:tcPr>
+                </a:tc>
+                <a:tc>
+                  <a:txBody>
+                    <a:bodyPr/>
+                    <a:lstStyle/>
+                    <a:p>
+                      <a:pPr algn="ctr"/>
+                      <a:r>
+                        <a:rPr sz="1100" b="0">
+                          <a:solidFill>
+                            <a:srgbClr val="212121"/>
+                          </a:solidFill>
+                          <a:latin typeface="Calibri"/>
+                        </a:rPr>
+                        <a:t>catégorie</a:t>
+                      </a:r>
+                    </a:p>
+                  </a:txBody>
+                  <a:tcPr>
+                    <a:solidFill>
+                      <a:srgbClr val="FFFFFF"/>
+                    </a:solidFill>
+                  </a:tcPr>
+                </a:tc>
+                <a:tc>
+                  <a:txBody>
+                    <a:bodyPr/>
+                    <a:lstStyle/>
+                    <a:p>
+                      <a:pPr algn="ctr"/>
+                      <a:r>
+                        <a:rPr sz="1100" b="0">
+                          <a:solidFill>
+                            <a:srgbClr val="212121"/>
+                          </a:solidFill>
+                          <a:latin typeface="Calibri"/>
+                        </a:rPr>
+                        <a:t>5 classes</a:t>
+                      </a:r>
+                    </a:p>
+                  </a:txBody>
+                  <a:tcPr>
+                    <a:solidFill>
+                      <a:srgbClr val="FFFFFF"/>
+                    </a:solidFill>
+                  </a:tcPr>
+                </a:tc>
+                <a:tc>
+                  <a:txBody>
+                    <a:bodyPr/>
+                    <a:lstStyle/>
+                    <a:p>
+                      <a:pPr algn="ctr"/>
+                      <a:r>
+                        <a:rPr sz="1100" b="0">
+                          <a:solidFill>
+                            <a:srgbClr val="212121"/>
+                          </a:solidFill>
+                          <a:latin typeface="Calibri"/>
+                        </a:rPr>
+                        <a:t>Cible multiclasse</a:t>
+                      </a:r>
+                    </a:p>
+                  </a:txBody>
+                  <a:tcPr>
+                    <a:solidFill>
+                      <a:srgbClr val="FFFFFF"/>
+                    </a:solidFill>
+                  </a:tcPr>
+                </a:tc>
+              </a:tr>
+              <a:tr h="346170">
+                <a:tc>
+                  <a:txBody>
+                    <a:bodyPr/>
+                    <a:lstStyle/>
+                    <a:p>
+                      <a:pPr algn="ctr"/>
+                      <a:r>
+                        <a:rPr sz="1100" b="0">
+                          <a:solidFill>
+                            <a:srgbClr val="212121"/>
+                          </a:solidFill>
+                          <a:latin typeface="Calibri"/>
+                        </a:rPr>
+                        <a:t>rul_hours</a:t>
+                      </a:r>
+                    </a:p>
+                  </a:txBody>
+                  <a:tcPr>
+                    <a:solidFill>
+                      <a:srgbClr val="F5F7FA"/>
+                    </a:solidFill>
+                  </a:tcPr>
+                </a:tc>
+                <a:tc>
+                  <a:txBody>
+                    <a:bodyPr/>
+                    <a:lstStyle/>
+                    <a:p>
+                      <a:pPr algn="ctr"/>
+                      <a:r>
+                        <a:rPr sz="1100" b="0">
+                          <a:solidFill>
+                            <a:srgbClr val="212121"/>
+                          </a:solidFill>
+                          <a:latin typeface="Calibri"/>
+                        </a:rPr>
+                        <a:t>float</a:t>
+                      </a:r>
+                    </a:p>
+                  </a:txBody>
+                  <a:tcPr>
+                    <a:solidFill>
+                      <a:srgbClr val="F5F7FA"/>
+                    </a:solidFill>
+                  </a:tcPr>
+                </a:tc>
+                <a:tc>
+                  <a:txBody>
+                    <a:bodyPr/>
+                    <a:lstStyle/>
+                    <a:p>
+                      <a:pPr algn="ctr"/>
+                      <a:r>
+                        <a:rPr sz="1100" b="0">
+                          <a:solidFill>
+                            <a:srgbClr val="212121"/>
+                          </a:solidFill>
+                          <a:latin typeface="Calibri"/>
+                        </a:rPr>
+                        <a:t>h</a:t>
+                      </a:r>
+                    </a:p>
+                  </a:txBody>
+                  <a:tcPr>
+                    <a:solidFill>
+                      <a:srgbClr val="F5F7FA"/>
+                    </a:solidFill>
+                  </a:tcPr>
+                </a:tc>
+                <a:tc>
+                  <a:txBody>
+                    <a:bodyPr/>
+                    <a:lstStyle/>
+                    <a:p>
+                      <a:pPr algn="ctr"/>
+                      <a:r>
+                        <a:rPr sz="1100" b="0">
+                          <a:solidFill>
+                            <a:srgbClr val="212121"/>
+                          </a:solidFill>
+                          <a:latin typeface="Calibri"/>
+                        </a:rPr>
                         <a:t>Cible régression (durée vie restante)</a:t>
                       </a:r>
                     </a:p>
                   </a:txBody>
                   <a:tcPr>
                     <a:solidFill>
-                      <a:srgbClr val="FFFFFF"/>
+                      <a:srgbClr val="F5F7FA"/>
                     </a:solidFill>
                   </a:tcPr>
                 </a:tc>

--- a/reports/11/presentation.pptx
+++ b/reports/11/presentation.pptx
@@ -4569,7 +4569,7 @@
                 </a:solidFill>
                 <a:latin typeface="Calibri"/>
               </a:rPr>
-              <a:t>Adam BELOUCIF (20220055)  ·  Emilien MORICE</a:t>
+              <a:t>Adam BELOUCIF  ·  Emilien MORICE</a:t>
             </a:r>
           </a:p>
         </p:txBody>
@@ -6906,7 +6906,7 @@
                 </a:solidFill>
                 <a:latin typeface="Calibri"/>
               </a:rPr>
-              <a:t>Adam BELOUCIF 20220055  ·  Emilien MORICE  ·  M1 DE&amp;IA EFREI 2025-2026</a:t>
+              <a:t>Adam BELOUCIF  ·  Emilien MORICE  ·  M1 DE&amp;IA EFREI 2025-2026</a:t>
             </a:r>
           </a:p>
         </p:txBody>

--- a/reports/11/presentation.pptx
+++ b/reports/11/presentation.pptx
@@ -4912,68 +4912,9 @@
           </a:p>
         </p:txBody>
       </p:sp>
-      <p:pic>
-        <p:nvPicPr>
-          <p:cNvPr id="9" name="Picture 8" descr="cost_threshold_xgboost.png"/>
-          <p:cNvPicPr>
-            <a:picLocks noChangeAspect="1"/>
-          </p:cNvPicPr>
-          <p:nvPr/>
-        </p:nvPicPr>
-        <p:blipFill>
-          <a:blip r:embed="rId3"/>
-          <a:stretch>
-            <a:fillRect/>
-          </a:stretch>
-        </p:blipFill>
-        <p:spPr>
-          <a:xfrm>
-            <a:off x="457200" y="1097280"/>
-            <a:ext cx="3866546" cy="2560320"/>
-          </a:xfrm>
-          <a:prstGeom prst="rect">
-            <a:avLst/>
-          </a:prstGeom>
-        </p:spPr>
-      </p:pic>
-      <p:sp>
-        <p:nvSpPr>
-          <p:cNvPr id="10" name="TextBox 9"/>
-          <p:cNvSpPr txBox="1"/>
-          <p:nvPr/>
-        </p:nvSpPr>
-        <p:spPr>
-          <a:xfrm>
-            <a:off x="457200" y="3730752"/>
-            <a:ext cx="3866546" cy="274320"/>
-          </a:xfrm>
-          <a:prstGeom prst="rect">
-            <a:avLst/>
-          </a:prstGeom>
-          <a:noFill/>
-        </p:spPr>
-        <p:txBody>
-          <a:bodyPr wrap="square">
-            <a:spAutoFit/>
-          </a:bodyPr>
-          <a:lstStyle/>
-          <a:p>
-            <a:pPr algn="ctr"/>
-            <a:r>
-              <a:rPr sz="1100" b="0" i="1">
-                <a:solidFill>
-                  <a:srgbClr val="6B7280"/>
-                </a:solidFill>
-                <a:latin typeface="Calibri"/>
-              </a:rPr>
-              <a:t>Courbe coût(seuil) XGBoost · minimum à 0.23</a:t>
-            </a:r>
-          </a:p>
-        </p:txBody>
-      </p:sp>
-      <p:sp>
-        <p:nvSpPr>
-          <p:cNvPr id="11" name="Rectangle 10"/>
+      <p:sp>
+        <p:nvSpPr>
+          <p:cNvPr id="9" name="Rectangle 8"/>
           <p:cNvSpPr/>
           <p:nvPr/>
         </p:nvSpPr>
@@ -5018,7 +4959,7 @@
       </p:sp>
       <p:sp>
         <p:nvSpPr>
-          <p:cNvPr id="12" name="TextBox 11"/>
+          <p:cNvPr id="10" name="TextBox 9"/>
           <p:cNvSpPr txBox="1"/>
           <p:nvPr/>
         </p:nvSpPr>
@@ -5055,7 +4996,7 @@
       </p:sp>
       <p:sp>
         <p:nvSpPr>
-          <p:cNvPr id="13" name="TextBox 12"/>
+          <p:cNvPr id="11" name="TextBox 10"/>
           <p:cNvSpPr txBox="1"/>
           <p:nvPr/>
         </p:nvSpPr>
@@ -5090,7 +5031,7 @@
       </p:sp>
       <p:sp>
         <p:nvSpPr>
-          <p:cNvPr id="14" name="TextBox 13"/>
+          <p:cNvPr id="12" name="TextBox 11"/>
           <p:cNvSpPr txBox="1"/>
           <p:nvPr/>
         </p:nvSpPr>
@@ -5193,7 +5134,7 @@
       </p:sp>
       <p:sp>
         <p:nvSpPr>
-          <p:cNvPr id="15" name="TextBox 14"/>
+          <p:cNvPr id="13" name="TextBox 12"/>
           <p:cNvSpPr txBox="1"/>
           <p:nvPr/>
         </p:nvSpPr>
@@ -5228,7 +5169,7 @@
       </p:sp>
       <p:graphicFrame>
         <p:nvGraphicFramePr>
-          <p:cNvPr id="16" name="Table 15"/>
+          <p:cNvPr id="14" name="Table 13"/>
           <p:cNvGraphicFramePr>
             <a:graphicFrameLocks noGrp="1"/>
           </p:cNvGraphicFramePr>
@@ -5610,7 +5551,7 @@
       </p:graphicFrame>
       <p:sp>
         <p:nvSpPr>
-          <p:cNvPr id="17" name="TextBox 16"/>
+          <p:cNvPr id="15" name="TextBox 14"/>
           <p:cNvSpPr txBox="1"/>
           <p:nvPr/>
         </p:nvSpPr>
@@ -10012,124 +9953,6 @@
           </a:p>
         </p:txBody>
       </p:sp>
-      <p:pic>
-        <p:nvPicPr>
-          <p:cNvPr id="9" name="Picture 8" descr="eda_correlation_heatmap.png"/>
-          <p:cNvPicPr>
-            <a:picLocks noChangeAspect="1"/>
-          </p:cNvPicPr>
-          <p:nvPr/>
-        </p:nvPicPr>
-        <p:blipFill>
-          <a:blip r:embed="rId3"/>
-          <a:stretch>
-            <a:fillRect/>
-          </a:stretch>
-        </p:blipFill>
-        <p:spPr>
-          <a:xfrm>
-            <a:off x="457200" y="1508760"/>
-            <a:ext cx="4578482" cy="4114800"/>
-          </a:xfrm>
-          <a:prstGeom prst="rect">
-            <a:avLst/>
-          </a:prstGeom>
-        </p:spPr>
-      </p:pic>
-      <p:sp>
-        <p:nvSpPr>
-          <p:cNvPr id="10" name="TextBox 9"/>
-          <p:cNvSpPr txBox="1"/>
-          <p:nvPr/>
-        </p:nvSpPr>
-        <p:spPr>
-          <a:xfrm>
-            <a:off x="457200" y="5696712"/>
-            <a:ext cx="4578482" cy="274320"/>
-          </a:xfrm>
-          <a:prstGeom prst="rect">
-            <a:avLst/>
-          </a:prstGeom>
-          <a:noFill/>
-        </p:spPr>
-        <p:txBody>
-          <a:bodyPr wrap="square">
-            <a:spAutoFit/>
-          </a:bodyPr>
-          <a:lstStyle/>
-          <a:p>
-            <a:pPr algn="ctr"/>
-            <a:r>
-              <a:rPr sz="1100" b="0" i="1">
-                <a:solidFill>
-                  <a:srgbClr val="6B7280"/>
-                </a:solidFill>
-                <a:latin typeface="Calibri"/>
-              </a:rPr>
-              <a:t>Matrice de corrélation capteurs x cible binaire</a:t>
-            </a:r>
-          </a:p>
-        </p:txBody>
-      </p:sp>
-      <p:pic>
-        <p:nvPicPr>
-          <p:cNvPr id="11" name="Picture 10" descr="eda_scatter_vib_temp.png"/>
-          <p:cNvPicPr>
-            <a:picLocks noChangeAspect="1"/>
-          </p:cNvPicPr>
-          <p:nvPr/>
-        </p:nvPicPr>
-        <p:blipFill>
-          <a:blip r:embed="rId4"/>
-          <a:stretch>
-            <a:fillRect/>
-          </a:stretch>
-        </p:blipFill>
-        <p:spPr>
-          <a:xfrm>
-            <a:off x="6245352" y="1508760"/>
-            <a:ext cx="5303520" cy="3677203"/>
-          </a:xfrm>
-          <a:prstGeom prst="rect">
-            <a:avLst/>
-          </a:prstGeom>
-        </p:spPr>
-      </p:pic>
-      <p:sp>
-        <p:nvSpPr>
-          <p:cNvPr id="12" name="TextBox 11"/>
-          <p:cNvSpPr txBox="1"/>
-          <p:nvPr/>
-        </p:nvSpPr>
-        <p:spPr>
-          <a:xfrm>
-            <a:off x="6245352" y="5259115"/>
-            <a:ext cx="5303520" cy="274320"/>
-          </a:xfrm>
-          <a:prstGeom prst="rect">
-            <a:avLst/>
-          </a:prstGeom>
-          <a:noFill/>
-        </p:spPr>
-        <p:txBody>
-          <a:bodyPr wrap="square">
-            <a:spAutoFit/>
-          </a:bodyPr>
-          <a:lstStyle/>
-          <a:p>
-            <a:pPr algn="ctr"/>
-            <a:r>
-              <a:rPr sz="1100" b="0" i="1">
-                <a:solidFill>
-                  <a:srgbClr val="6B7280"/>
-                </a:solidFill>
-                <a:latin typeface="Calibri"/>
-              </a:rPr>
-              <a:t>Scatter vibration x température (zone haute droite = pannes)</a:t>
-            </a:r>
-          </a:p>
-        </p:txBody>
-      </p:sp>
     </p:spTree>
   </p:cSld>
   <p:clrMapOvr>
@@ -10450,40 +10273,16 @@
           </a:p>
         </p:txBody>
       </p:sp>
-      <p:pic>
-        <p:nvPicPr>
-          <p:cNvPr id="9" name="Picture 8" descr="diagram_ml_pipeline.png"/>
-          <p:cNvPicPr>
-            <a:picLocks noChangeAspect="1"/>
-          </p:cNvPicPr>
-          <p:nvPr/>
-        </p:nvPicPr>
-        <p:blipFill>
-          <a:blip r:embed="rId3"/>
-          <a:stretch>
-            <a:fillRect/>
-          </a:stretch>
-        </p:blipFill>
-        <p:spPr>
-          <a:xfrm>
-            <a:off x="5486400" y="685800"/>
-            <a:ext cx="6400800" cy="2026152"/>
-          </a:xfrm>
-          <a:prstGeom prst="rect">
-            <a:avLst/>
-          </a:prstGeom>
-        </p:spPr>
-      </p:pic>
-      <p:sp>
-        <p:nvSpPr>
-          <p:cNvPr id="10" name="TextBox 9"/>
+      <p:sp>
+        <p:nvSpPr>
+          <p:cNvPr id="9" name="TextBox 8"/>
           <p:cNvSpPr txBox="1"/>
           <p:nvPr/>
         </p:nvSpPr>
         <p:spPr>
           <a:xfrm>
-            <a:off x="5486400" y="2785104"/>
-            <a:ext cx="6400800" cy="274320"/>
+            <a:off x="274320" y="2743200"/>
+            <a:ext cx="5029200" cy="365760"/>
           </a:xfrm>
           <a:prstGeom prst="rect">
             <a:avLst/>
@@ -10496,41 +10295,6 @@
           </a:bodyPr>
           <a:lstStyle/>
           <a:p>
-            <a:pPr algn="ctr"/>
-            <a:r>
-              <a:rPr sz="1100" b="0" i="1">
-                <a:solidFill>
-                  <a:srgbClr val="6B7280"/>
-                </a:solidFill>
-                <a:latin typeface="Calibri"/>
-              </a:rPr>
-              <a:t>Diagramme pipeline ML (preprocessing + train + éval)</a:t>
-            </a:r>
-          </a:p>
-        </p:txBody>
-      </p:sp>
-      <p:sp>
-        <p:nvSpPr>
-          <p:cNvPr id="11" name="TextBox 10"/>
-          <p:cNvSpPr txBox="1"/>
-          <p:nvPr/>
-        </p:nvSpPr>
-        <p:spPr>
-          <a:xfrm>
-            <a:off x="274320" y="2743200"/>
-            <a:ext cx="5029200" cy="365760"/>
-          </a:xfrm>
-          <a:prstGeom prst="rect">
-            <a:avLst/>
-          </a:prstGeom>
-          <a:noFill/>
-        </p:spPr>
-        <p:txBody>
-          <a:bodyPr wrap="square">
-            <a:spAutoFit/>
-          </a:bodyPr>
-          <a:lstStyle/>
-          <a:p>
             <a:pPr algn="l"/>
             <a:r>
               <a:rPr sz="1400" b="1" i="0">
@@ -10546,7 +10310,7 @@
       </p:sp>
       <p:graphicFrame>
         <p:nvGraphicFramePr>
-          <p:cNvPr id="12" name="Table 11"/>
+          <p:cNvPr id="10" name="Table 9"/>
           <p:cNvGraphicFramePr>
             <a:graphicFrameLocks noGrp="1"/>
           </p:cNvGraphicFramePr>
